--- a/International_breweries Power-BI-Storytelling.pptx
+++ b/International_breweries Power-BI-Storytelling.pptx
@@ -3640,14 +3640,14 @@
               <p:nvPr>
                 <p:extLst>
                   <p:ext uri="{D42A27DB-BD31-4B8C-83A1-F6EECF244321}">
-                    <p14:modId xmlns:p14="http://schemas.microsoft.com/office/powerpoint/2010/main" val="1662045703"/>
+                    <p14:modId xmlns:p14="http://schemas.microsoft.com/office/powerpoint/2010/main" val="3163777609"/>
                   </p:ext>
                 </p:extLst>
               </p:nvPr>
             </p:nvGraphicFramePr>
             <p:xfrm>
-              <a:off x="261257" y="513185"/>
-              <a:ext cx="11709919" cy="5542382"/>
+              <a:off x="111967" y="363894"/>
+              <a:ext cx="12008498" cy="5813048"/>
             </p:xfrm>
             <a:graphic>
               <a:graphicData uri="http://schemas.microsoft.com/office/webextensions/webextension/2010/11">
@@ -3679,8 +3679,8 @@
             </p:blipFill>
             <p:spPr>
               <a:xfrm>
-                <a:off x="261257" y="513185"/>
-                <a:ext cx="11709919" cy="5542382"/>
+                <a:off x="111967" y="363894"/>
+                <a:ext cx="12008498" cy="5813048"/>
               </a:xfrm>
               <a:prstGeom prst="rect">
                 <a:avLst/>
@@ -4840,21 +4840,21 @@
 </file>
 
 <file path=customXml/item1.xml><?xml version="1.0" encoding="utf-8"?>
+<p:properties xmlns:p="http://schemas.microsoft.com/office/2006/metadata/properties" xmlns:xsi="http://www.w3.org/2001/XMLSchema-instance" xmlns:pc="http://schemas.microsoft.com/office/infopath/2007/PartnerControls">
+  <documentManagement>
+    <Document_x0020_Purpose xmlns="f577acbf-5b0b-4b4f-9948-268e97f8d3a4">Informational</Document_x0020_Purpose>
+    <Initiatives xmlns="f577acbf-5b0b-4b4f-9948-268e97f8d3a4"/>
+  </documentManagement>
+</p:properties>
+</file>
+
+<file path=customXml/item2.xml><?xml version="1.0" encoding="utf-8"?>
 <?mso-contentType ?>
 <FormTemplates xmlns="http://schemas.microsoft.com/sharepoint/v3/contenttype/forms">
   <Display>DocumentLibraryForm</Display>
   <Edit>DocumentLibraryForm</Edit>
   <New>DocumentLibraryForm</New>
 </FormTemplates>
-</file>
-
-<file path=customXml/item2.xml><?xml version="1.0" encoding="utf-8"?>
-<p:properties xmlns:p="http://schemas.microsoft.com/office/2006/metadata/properties" xmlns:xsi="http://www.w3.org/2001/XMLSchema-instance" xmlns:pc="http://schemas.microsoft.com/office/infopath/2007/PartnerControls">
-  <documentManagement>
-    <Document_x0020_Purpose xmlns="f577acbf-5b0b-4b4f-9948-268e97f8d3a4">Informational</Document_x0020_Purpose>
-    <Initiatives xmlns="f577acbf-5b0b-4b4f-9948-268e97f8d3a4"/>
-  </documentManagement>
-</p:properties>
 </file>
 
 <file path=customXml/item3.xml><?xml version="1.0" encoding="utf-8"?>
@@ -5114,14 +5114,6 @@
 </file>
 
 <file path=customXml/itemProps1.xml><?xml version="1.0" encoding="utf-8"?>
-<ds:datastoreItem xmlns:ds="http://schemas.openxmlformats.org/officeDocument/2006/customXml" ds:itemID="{E21AFCC0-734A-4A90-A597-A1CB34860DCD}">
-  <ds:schemaRefs>
-    <ds:schemaRef ds:uri="http://schemas.microsoft.com/sharepoint/v3/contenttype/forms"/>
-  </ds:schemaRefs>
-</ds:datastoreItem>
-</file>
-
-<file path=customXml/itemProps2.xml><?xml version="1.0" encoding="utf-8"?>
 <ds:datastoreItem xmlns:ds="http://schemas.openxmlformats.org/officeDocument/2006/customXml" ds:itemID="{617AB1FA-2F28-4684-9230-02ACEB6C0B0A}">
   <ds:schemaRefs>
     <ds:schemaRef ds:uri="http://purl.org/dc/terms/"/>
@@ -5134,6 +5126,14 @@
     <ds:schemaRef ds:uri="http://schemas.microsoft.com/office/2006/metadata/properties"/>
     <ds:schemaRef ds:uri="http://www.w3.org/XML/1998/namespace"/>
     <ds:schemaRef ds:uri="http://purl.org/dc/elements/1.1/"/>
+  </ds:schemaRefs>
+</ds:datastoreItem>
+</file>
+
+<file path=customXml/itemProps2.xml><?xml version="1.0" encoding="utf-8"?>
+<ds:datastoreItem xmlns:ds="http://schemas.openxmlformats.org/officeDocument/2006/customXml" ds:itemID="{E21AFCC0-734A-4A90-A597-A1CB34860DCD}">
+  <ds:schemaRefs>
+    <ds:schemaRef ds:uri="http://schemas.microsoft.com/sharepoint/v3/contenttype/forms"/>
   </ds:schemaRefs>
 </ds:datastoreItem>
 </file>

--- a/International_breweries Power-BI-Storytelling.pptx
+++ b/International_breweries Power-BI-Storytelling.pptx
@@ -3640,14 +3640,14 @@
               <p:nvPr>
                 <p:extLst>
                   <p:ext uri="{D42A27DB-BD31-4B8C-83A1-F6EECF244321}">
-                    <p14:modId xmlns:p14="http://schemas.microsoft.com/office/powerpoint/2010/main" val="3163777609"/>
+                    <p14:modId xmlns:p14="http://schemas.microsoft.com/office/powerpoint/2010/main" val="3325785547"/>
                   </p:ext>
                 </p:extLst>
               </p:nvPr>
             </p:nvGraphicFramePr>
             <p:xfrm>
-              <a:off x="111967" y="363894"/>
-              <a:ext cx="12008498" cy="5813048"/>
+              <a:off x="261257" y="513185"/>
+              <a:ext cx="11209731" cy="5542382"/>
             </p:xfrm>
             <a:graphic>
               <a:graphicData uri="http://schemas.microsoft.com/office/webextensions/webextension/2010/11">
@@ -3679,8 +3679,8 @@
             </p:blipFill>
             <p:spPr>
               <a:xfrm>
-                <a:off x="111967" y="363894"/>
-                <a:ext cx="12008498" cy="5813048"/>
+                <a:off x="261257" y="513185"/>
+                <a:ext cx="11209731" cy="5542382"/>
               </a:xfrm>
               <a:prstGeom prst="rect">
                 <a:avLst/>
@@ -4840,21 +4840,21 @@
 </file>
 
 <file path=customXml/item1.xml><?xml version="1.0" encoding="utf-8"?>
+<?mso-contentType ?>
+<FormTemplates xmlns="http://schemas.microsoft.com/sharepoint/v3/contenttype/forms">
+  <Display>DocumentLibraryForm</Display>
+  <Edit>DocumentLibraryForm</Edit>
+  <New>DocumentLibraryForm</New>
+</FormTemplates>
+</file>
+
+<file path=customXml/item2.xml><?xml version="1.0" encoding="utf-8"?>
 <p:properties xmlns:p="http://schemas.microsoft.com/office/2006/metadata/properties" xmlns:xsi="http://www.w3.org/2001/XMLSchema-instance" xmlns:pc="http://schemas.microsoft.com/office/infopath/2007/PartnerControls">
   <documentManagement>
     <Document_x0020_Purpose xmlns="f577acbf-5b0b-4b4f-9948-268e97f8d3a4">Informational</Document_x0020_Purpose>
     <Initiatives xmlns="f577acbf-5b0b-4b4f-9948-268e97f8d3a4"/>
   </documentManagement>
 </p:properties>
-</file>
-
-<file path=customXml/item2.xml><?xml version="1.0" encoding="utf-8"?>
-<?mso-contentType ?>
-<FormTemplates xmlns="http://schemas.microsoft.com/sharepoint/v3/contenttype/forms">
-  <Display>DocumentLibraryForm</Display>
-  <Edit>DocumentLibraryForm</Edit>
-  <New>DocumentLibraryForm</New>
-</FormTemplates>
 </file>
 
 <file path=customXml/item3.xml><?xml version="1.0" encoding="utf-8"?>
@@ -5114,6 +5114,14 @@
 </file>
 
 <file path=customXml/itemProps1.xml><?xml version="1.0" encoding="utf-8"?>
+<ds:datastoreItem xmlns:ds="http://schemas.openxmlformats.org/officeDocument/2006/customXml" ds:itemID="{E21AFCC0-734A-4A90-A597-A1CB34860DCD}">
+  <ds:schemaRefs>
+    <ds:schemaRef ds:uri="http://schemas.microsoft.com/sharepoint/v3/contenttype/forms"/>
+  </ds:schemaRefs>
+</ds:datastoreItem>
+</file>
+
+<file path=customXml/itemProps2.xml><?xml version="1.0" encoding="utf-8"?>
 <ds:datastoreItem xmlns:ds="http://schemas.openxmlformats.org/officeDocument/2006/customXml" ds:itemID="{617AB1FA-2F28-4684-9230-02ACEB6C0B0A}">
   <ds:schemaRefs>
     <ds:schemaRef ds:uri="http://purl.org/dc/terms/"/>
@@ -5126,14 +5134,6 @@
     <ds:schemaRef ds:uri="http://schemas.microsoft.com/office/2006/metadata/properties"/>
     <ds:schemaRef ds:uri="http://www.w3.org/XML/1998/namespace"/>
     <ds:schemaRef ds:uri="http://purl.org/dc/elements/1.1/"/>
-  </ds:schemaRefs>
-</ds:datastoreItem>
-</file>
-
-<file path=customXml/itemProps2.xml><?xml version="1.0" encoding="utf-8"?>
-<ds:datastoreItem xmlns:ds="http://schemas.openxmlformats.org/officeDocument/2006/customXml" ds:itemID="{E21AFCC0-734A-4A90-A597-A1CB34860DCD}">
-  <ds:schemaRefs>
-    <ds:schemaRef ds:uri="http://schemas.microsoft.com/sharepoint/v3/contenttype/forms"/>
   </ds:schemaRefs>
 </ds:datastoreItem>
 </file>
